--- a/dist/초1/국어/대화와문학/초1_국어_대화와문학_03_그림책읽고이야기하기.pptx
+++ b/dist/초1/국어/대화와문학/초1_국어_대화와문학_03_그림책읽고이야기하기.pptx
@@ -120,19 +120,19 @@
   <p:extLst>
     <p:ext uri="{521415D9-36F7-43E2-AB2F-B90AF26B5E84}">
       <p14:sectionLst xmlns:p14="http://schemas.microsoft.com/office/powerpoint/2010/main">
-        <p14:section name="도입" id="{a7b9a82b-b46a-3e50-bcdb-791675beec56}">
+        <p14:section name="도입" id="{c1a43e77-c6f5-0e12-dfaa-6af96b75a7d8}">
           <p14:sldIdLst>
             <p14:sldId id="256"/>
             <p14:sldId id="257"/>
           </p14:sldIdLst>
         </p14:section>
-        <p14:section name="개념" id="{9dd6a4c5-1419-ebfe-af96-b905038c93ca}">
+        <p14:section name="개념" id="{f4202790-e242-598f-e46d-b7d1dba30468}">
           <p14:sldIdLst>
             <p14:sldId id="258"/>
             <p14:sldId id="259"/>
           </p14:sldIdLst>
         </p14:section>
-        <p14:section name="연습" id="{d4b19663-7dc0-4470-af58-80871cc4faa1}">
+        <p14:section name="연습" id="{2894b54a-2e28-6890-3ed6-e30ef7e4e1ac}">
           <p14:sldIdLst>
             <p14:sldId id="260"/>
             <p14:sldId id="261"/>
@@ -141,19 +141,19 @@
             <p14:sldId id="264"/>
           </p14:sldIdLst>
         </p14:section>
-        <p14:section name="확인" id="{ad8ec648-8979-7162-7cbd-2a67579634cd}">
+        <p14:section name="확인" id="{6afac244-b30e-acf9-e636-06a9fb2f7780}">
           <p14:sldIdLst>
             <p14:sldId id="265"/>
             <p14:sldId id="266"/>
             <p14:sldId id="267"/>
           </p14:sldIdLst>
         </p14:section>
-        <p14:section name="정리" id="{5b1d95e9-e5ef-7d11-3bc3-7a449ff67056}">
+        <p14:section name="정리" id="{c4874204-ef42-bfd2-1616-f1622055bf34}">
           <p14:sldIdLst>
             <p14:sldId id="268"/>
           </p14:sldIdLst>
         </p14:section>
-        <p14:section name="보충" id="{fd62e1ad-ac0e-5bd9-d391-7bfcfa53938a}">
+        <p14:section name="보충" id="{1c952f15-9717-aed9-f9ce-c07622b498bf}">
           <p14:sldIdLst>
             <p14:sldId id="269"/>
           </p14:sldIdLst>

--- a/dist/초1/국어/대화와문학/초1_국어_대화와문학_03_그림책읽고이야기하기.pptx
+++ b/dist/초1/국어/대화와문학/초1_국어_대화와문학_03_그림책읽고이야기하기.pptx
@@ -120,19 +120,19 @@
   <p:extLst>
     <p:ext uri="{521415D9-36F7-43E2-AB2F-B90AF26B5E84}">
       <p14:sectionLst xmlns:p14="http://schemas.microsoft.com/office/powerpoint/2010/main">
-        <p14:section name="도입" id="{c1a43e77-c6f5-0e12-dfaa-6af96b75a7d8}">
+        <p14:section name="도입" id="{ab8df345-9990-ebcd-f970-bc3531fcb5ef}">
           <p14:sldIdLst>
             <p14:sldId id="256"/>
             <p14:sldId id="257"/>
           </p14:sldIdLst>
         </p14:section>
-        <p14:section name="개념" id="{f4202790-e242-598f-e46d-b7d1dba30468}">
+        <p14:section name="개념" id="{6b829889-cdcb-fa55-e0b0-8033a6110a03}">
           <p14:sldIdLst>
             <p14:sldId id="258"/>
             <p14:sldId id="259"/>
           </p14:sldIdLst>
         </p14:section>
-        <p14:section name="연습" id="{2894b54a-2e28-6890-3ed6-e30ef7e4e1ac}">
+        <p14:section name="연습" id="{f661083d-72bb-87dc-5630-fcc78305aaf3}">
           <p14:sldIdLst>
             <p14:sldId id="260"/>
             <p14:sldId id="261"/>
@@ -141,19 +141,19 @@
             <p14:sldId id="264"/>
           </p14:sldIdLst>
         </p14:section>
-        <p14:section name="확인" id="{6afac244-b30e-acf9-e636-06a9fb2f7780}">
+        <p14:section name="확인" id="{1ee54288-304b-3314-dc16-95528dbbb746}">
           <p14:sldIdLst>
             <p14:sldId id="265"/>
             <p14:sldId id="266"/>
             <p14:sldId id="267"/>
           </p14:sldIdLst>
         </p14:section>
-        <p14:section name="정리" id="{c4874204-ef42-bfd2-1616-f1622055bf34}">
+        <p14:section name="정리" id="{ff47623f-8db1-8830-b9be-0c8358bab732}">
           <p14:sldIdLst>
             <p14:sldId id="268"/>
           </p14:sldIdLst>
         </p14:section>
-        <p14:section name="보충" id="{1c952f15-9717-aed9-f9ce-c07622b498bf}">
+        <p14:section name="보충" id="{8c0ce090-bb6a-439e-be57-a47ec219e75f}">
           <p14:sldIdLst>
             <p14:sldId id="269"/>
           </p14:sldIdLst>
@@ -2942,7 +2942,7 @@
               <a:buNone/>
             </a:pPr>
             <a:r>
-              <a:rPr lang="ko-KR" altLang="en-US" sz="5000" b="1" dirty="0">
+              <a:rPr lang="ko-KR" altLang="en-US" sz="4400" b="1" dirty="0">
                 <a:solidFill>
                   <a:srgbClr val="FFFFFF"/>
                 </a:solidFill>
